--- a/StormCare_RAG_Demo_Presentation.pptx
+++ b/StormCare_RAG_Demo_Presentation.pptx
@@ -4222,9 +4222,6 @@
         <a:lstStyle/>
         <a:p>
           <a:pPr>
-            <a:lnSpc>
-              <a:spcPct val="100000"/>
-            </a:lnSpc>
             <a:defRPr cap="all"/>
           </a:pPr>
           <a:r>
@@ -4238,9 +4235,6 @@
         </a:p>
         <a:p>
           <a:pPr>
-            <a:lnSpc>
-              <a:spcPct val="100000"/>
-            </a:lnSpc>
             <a:defRPr cap="all"/>
           </a:pPr>
           <a:r>
@@ -4253,9 +4247,6 @@
         </a:p>
         <a:p>
           <a:pPr>
-            <a:lnSpc>
-              <a:spcPct val="100000"/>
-            </a:lnSpc>
             <a:defRPr cap="all"/>
           </a:pPr>
           <a:endParaRPr lang="en-US" dirty="0"/>
@@ -4298,9 +4289,6 @@
         <a:lstStyle/>
         <a:p>
           <a:pPr>
-            <a:lnSpc>
-              <a:spcPct val="100000"/>
-            </a:lnSpc>
             <a:defRPr cap="all"/>
           </a:pPr>
           <a:r>
@@ -4310,18 +4298,27 @@
         </a:p>
         <a:p>
           <a:pPr>
-            <a:lnSpc>
-              <a:spcPct val="100000"/>
-            </a:lnSpc>
             <a:defRPr cap="all"/>
           </a:pPr>
+          <a:r>
+            <a:rPr lang="en-US">
+              <a:hlinkClick xmlns:r="http://schemas.openxmlformats.org/officeDocument/2006/relationships" r:id="rId2"/>
+            </a:rPr>
+            <a:t>https</a:t>
+          </a:r>
           <a:r>
             <a:rPr lang="en-US" dirty="0">
               <a:hlinkClick xmlns:r="http://schemas.openxmlformats.org/officeDocument/2006/relationships" r:id="rId2"/>
             </a:rPr>
-            <a:t>https://genaiadrija-4hgtalkipufv8gsbb3qmvi.streamlit.app/</a:t>
+            <a:t>://genaiadrija-4hgtalkipufv8gsbb3qmvi.streamlit.</a:t>
           </a:r>
-          <a:endParaRPr lang="en-US" dirty="0"/>
+          <a:r>
+            <a:rPr lang="en-US">
+              <a:hlinkClick xmlns:r="http://schemas.openxmlformats.org/officeDocument/2006/relationships" r:id="rId2"/>
+            </a:rPr>
+            <a:t>app/</a:t>
+          </a:r>
+          <a:endParaRPr lang="en-US"/>
         </a:p>
         <a:p>
           <a:pPr>
@@ -4361,56 +4358,12 @@
         <a:lstStyle/>
         <a:p>
           <a:pPr>
-            <a:lnSpc>
-              <a:spcPct val="100000"/>
-            </a:lnSpc>
             <a:defRPr cap="all"/>
           </a:pPr>
           <a:r>
-            <a:rPr lang="en-US" dirty="0"/>
+            <a:rPr lang="en-US"/>
             <a:t>Video link:</a:t>
           </a:r>
-        </a:p>
-        <a:p>
-          <a:pPr>
-            <a:lnSpc>
-              <a:spcPct val="100000"/>
-            </a:lnSpc>
-            <a:defRPr cap="all"/>
-          </a:pPr>
-          <a:r>
-            <a:rPr lang="en-US" dirty="0">
-              <a:hlinkClick xmlns:r="http://schemas.openxmlformats.org/officeDocument/2006/relationships" r:id="rId3"/>
-            </a:rPr>
-            <a:t>https://youtu.be/2xwT7fOimkU</a:t>
-          </a:r>
-          <a:endParaRPr lang="en-US" dirty="0"/>
-        </a:p>
-        <a:p>
-          <a:pPr>
-            <a:lnSpc>
-              <a:spcPct val="100000"/>
-            </a:lnSpc>
-            <a:defRPr cap="all"/>
-          </a:pPr>
-          <a:endParaRPr lang="en-US" dirty="0"/>
-        </a:p>
-        <a:p>
-          <a:pPr>
-            <a:lnSpc>
-              <a:spcPct val="100000"/>
-            </a:lnSpc>
-            <a:defRPr cap="all"/>
-          </a:pPr>
-          <a:endParaRPr lang="en-US" dirty="0"/>
-        </a:p>
-        <a:p>
-          <a:pPr>
-            <a:lnSpc>
-              <a:spcPct val="100000"/>
-            </a:lnSpc>
-            <a:defRPr cap="all"/>
-          </a:pPr>
           <a:endParaRPr lang="en-US" dirty="0"/>
         </a:p>
       </dgm:t>
@@ -4464,7 +4417,7 @@
                 <a14:useLocalDpi xmlns:a14="http://schemas.microsoft.com/office/drawing/2010/main" val="0"/>
               </a:ext>
               <a:ext uri="{96DAC541-7B7A-43D3-8B79-37D633B846F1}">
-                <asvg:svgBlip xmlns:asvg="http://schemas.microsoft.com/office/drawing/2016/SVG/main" r:embed="rId4"/>
+                <asvg:svgBlip xmlns:asvg="http://schemas.microsoft.com/office/drawing/2016/SVG/main" r:embed="rId3"/>
               </a:ext>
             </a:extLst>
           </a:blip>
@@ -4517,7 +4470,7 @@
                 <a14:useLocalDpi xmlns:a14="http://schemas.microsoft.com/office/drawing/2010/main" val="0"/>
               </a:ext>
               <a:ext uri="{96DAC541-7B7A-43D3-8B79-37D633B846F1}">
-                <asvg:svgBlip xmlns:asvg="http://schemas.microsoft.com/office/drawing/2016/SVG/main" r:embed="rId5"/>
+                <asvg:svgBlip xmlns:asvg="http://schemas.microsoft.com/office/drawing/2016/SVG/main" r:embed="rId4"/>
               </a:ext>
             </a:extLst>
           </a:blip>
@@ -4570,7 +4523,7 @@
                 <a14:useLocalDpi xmlns:a14="http://schemas.microsoft.com/office/drawing/2010/main" val="0"/>
               </a:ext>
               <a:ext uri="{96DAC541-7B7A-43D3-8B79-37D633B846F1}">
-                <asvg:svgBlip xmlns:asvg="http://schemas.microsoft.com/office/drawing/2016/SVG/main" r:embed="rId6"/>
+                <asvg:svgBlip xmlns:asvg="http://schemas.microsoft.com/office/drawing/2016/SVG/main" r:embed="rId5"/>
               </a:ext>
             </a:extLst>
           </a:blip>
@@ -4603,9 +4556,9 @@
     </dgm:pt>
   </dgm:ptLst>
   <dgm:cxnLst>
-    <dgm:cxn modelId="{B2854E6A-4E72-40D9-9A8C-3703E3FEFA3C}" srcId="{2099A6BA-3028-4DF3-8F57-262A9AAD64FC}" destId="{010FC63B-D0C5-4648-9A5C-DD855D043A90}" srcOrd="0" destOrd="0" parTransId="{1FF65F5B-1647-4960-98FD-A6988F85B0E2}" sibTransId="{F0B41C69-8162-4B63-9E94-5F7C23EC6856}"/>
     <dgm:cxn modelId="{B897465A-DA05-413D-BF9F-DA0B4D011F15}" srcId="{2099A6BA-3028-4DF3-8F57-262A9AAD64FC}" destId="{74747CF1-DCEA-4946-87A2-51F30250DF55}" srcOrd="1" destOrd="0" parTransId="{C0633FF5-8433-4030-B4B9-A891A7DB0929}" sibTransId="{5158B268-A82D-4AA2-AA86-7187F324DA83}"/>
     <dgm:cxn modelId="{3C26FF5A-CBF1-4E7E-9F92-026C6C7395FC}" type="presOf" srcId="{DA907988-8DE7-49A8-8128-F8F339A33528}" destId="{4A179652-BED0-4164-865F-D6E0FA29BAF9}" srcOrd="0" destOrd="0" presId="urn:microsoft.com/office/officeart/2018/5/layout/IconCircleLabelList"/>
+    <dgm:cxn modelId="{B2854E6A-4E72-40D9-9A8C-3703E3FEFA3C}" srcId="{2099A6BA-3028-4DF3-8F57-262A9AAD64FC}" destId="{010FC63B-D0C5-4648-9A5C-DD855D043A90}" srcOrd="0" destOrd="0" parTransId="{1FF65F5B-1647-4960-98FD-A6988F85B0E2}" sibTransId="{F0B41C69-8162-4B63-9E94-5F7C23EC6856}"/>
     <dgm:cxn modelId="{7937D4A6-FEF8-4015-AC64-62F660DA11BD}" srcId="{2099A6BA-3028-4DF3-8F57-262A9AAD64FC}" destId="{DA907988-8DE7-49A8-8128-F8F339A33528}" srcOrd="2" destOrd="0" parTransId="{EBBF462F-499C-4EC5-A81C-B513151F4CF1}" sibTransId="{9C8D41C3-7A78-4FA9-A954-98CD59DBA083}"/>
     <dgm:cxn modelId="{384BC0B0-FCB6-4BB7-AC2D-B967D332CEC2}" type="presOf" srcId="{010FC63B-D0C5-4648-9A5C-DD855D043A90}" destId="{CB8CB51A-1A8F-4B19-BFD8-C3AFE516094D}" srcOrd="0" destOrd="0" presId="urn:microsoft.com/office/officeart/2018/5/layout/IconCircleLabelList"/>
     <dgm:cxn modelId="{C067C6D5-69BE-4A09-997C-567D2178822D}" type="presOf" srcId="{2099A6BA-3028-4DF3-8F57-262A9AAD64FC}" destId="{72F85177-C4F3-45B6-AD9E-C347693E2C14}" srcOrd="0" destOrd="0" presId="urn:microsoft.com/office/officeart/2018/5/layout/IconCircleLabelList"/>
@@ -6273,7 +6226,7 @@
       </dsp:nvSpPr>
       <dsp:spPr>
         <a:xfrm>
-          <a:off x="518185" y="577652"/>
+          <a:off x="518185" y="647964"/>
           <a:ext cx="1475437" cy="1475437"/>
         </a:xfrm>
         <a:prstGeom prst="ellipse">
@@ -6313,7 +6266,7 @@
       </dsp:nvSpPr>
       <dsp:spPr>
         <a:xfrm>
-          <a:off x="832623" y="892090"/>
+          <a:off x="832623" y="962402"/>
           <a:ext cx="846562" cy="846562"/>
         </a:xfrm>
         <a:prstGeom prst="rect">
@@ -6362,8 +6315,8 @@
       </dsp:nvSpPr>
       <dsp:spPr>
         <a:xfrm>
-          <a:off x="46529" y="2512652"/>
-          <a:ext cx="2418750" cy="1102500"/>
+          <a:off x="46529" y="2582965"/>
+          <a:ext cx="2418750" cy="961875"/>
         </a:xfrm>
         <a:prstGeom prst="rect">
           <a:avLst/>
@@ -6394,7 +6347,7 @@
         <a:p>
           <a:pPr marL="0" lvl="0" indent="0" algn="ctr" defTabSz="488950">
             <a:lnSpc>
-              <a:spcPct val="100000"/>
+              <a:spcPct val="90000"/>
             </a:lnSpc>
             <a:spcBef>
               <a:spcPct val="0"/>
@@ -6406,84 +6359,15 @@
             <a:defRPr cap="all"/>
           </a:pPr>
           <a:r>
-            <a:rPr lang="en-US" sz="1100" kern="1200" dirty="0"/>
+            <a:rPr lang="en-US" sz="1100" kern="1200"/>
             <a:t>Video link:</a:t>
           </a:r>
-        </a:p>
-        <a:p>
-          <a:pPr marL="0" lvl="0" indent="0" algn="ctr" defTabSz="488950">
-            <a:lnSpc>
-              <a:spcPct val="100000"/>
-            </a:lnSpc>
-            <a:spcBef>
-              <a:spcPct val="0"/>
-            </a:spcBef>
-            <a:spcAft>
-              <a:spcPct val="35000"/>
-            </a:spcAft>
-            <a:buNone/>
-            <a:defRPr cap="all"/>
-          </a:pPr>
-          <a:r>
-            <a:rPr lang="en-US" sz="1100" kern="1200" dirty="0">
-              <a:hlinkClick xmlns:r="http://schemas.openxmlformats.org/officeDocument/2006/relationships" r:id="rId2"/>
-            </a:rPr>
-            <a:t>https://youtu.be/2xwT7fOimkU</a:t>
-          </a:r>
-          <a:endParaRPr lang="en-US" sz="1100" kern="1200" dirty="0"/>
-        </a:p>
-        <a:p>
-          <a:pPr marL="0" lvl="0" indent="0" algn="ctr" defTabSz="488950">
-            <a:lnSpc>
-              <a:spcPct val="100000"/>
-            </a:lnSpc>
-            <a:spcBef>
-              <a:spcPct val="0"/>
-            </a:spcBef>
-            <a:spcAft>
-              <a:spcPct val="35000"/>
-            </a:spcAft>
-            <a:buNone/>
-            <a:defRPr cap="all"/>
-          </a:pPr>
-          <a:endParaRPr lang="en-US" sz="1100" kern="1200" dirty="0"/>
-        </a:p>
-        <a:p>
-          <a:pPr marL="0" lvl="0" indent="0" algn="ctr" defTabSz="488950">
-            <a:lnSpc>
-              <a:spcPct val="100000"/>
-            </a:lnSpc>
-            <a:spcBef>
-              <a:spcPct val="0"/>
-            </a:spcBef>
-            <a:spcAft>
-              <a:spcPct val="35000"/>
-            </a:spcAft>
-            <a:buNone/>
-            <a:defRPr cap="all"/>
-          </a:pPr>
-          <a:endParaRPr lang="en-US" sz="1100" kern="1200" dirty="0"/>
-        </a:p>
-        <a:p>
-          <a:pPr marL="0" lvl="0" indent="0" algn="ctr" defTabSz="488950">
-            <a:lnSpc>
-              <a:spcPct val="100000"/>
-            </a:lnSpc>
-            <a:spcBef>
-              <a:spcPct val="0"/>
-            </a:spcBef>
-            <a:spcAft>
-              <a:spcPct val="35000"/>
-            </a:spcAft>
-            <a:buNone/>
-            <a:defRPr cap="all"/>
-          </a:pPr>
           <a:endParaRPr lang="en-US" sz="1100" kern="1200" dirty="0"/>
         </a:p>
       </dsp:txBody>
       <dsp:txXfrm>
-        <a:off x="46529" y="2512652"/>
-        <a:ext cx="2418750" cy="1102500"/>
+        <a:off x="46529" y="2582965"/>
+        <a:ext cx="2418750" cy="961875"/>
       </dsp:txXfrm>
     </dsp:sp>
     <dsp:sp modelId="{7E25C88D-7D8F-4191-AC7A-96139CB70682}">
@@ -6493,7 +6377,7 @@
       </dsp:nvSpPr>
       <dsp:spPr>
         <a:xfrm>
-          <a:off x="3360216" y="577652"/>
+          <a:off x="3360216" y="647964"/>
           <a:ext cx="1475437" cy="1475437"/>
         </a:xfrm>
         <a:prstGeom prst="ellipse">
@@ -6533,7 +6417,7 @@
       </dsp:nvSpPr>
       <dsp:spPr>
         <a:xfrm>
-          <a:off x="3674654" y="892090"/>
+          <a:off x="3674654" y="962402"/>
           <a:ext cx="846562" cy="846562"/>
         </a:xfrm>
         <a:prstGeom prst="rect">
@@ -6546,7 +6430,7 @@
                 <a14:useLocalDpi xmlns:a14="http://schemas.microsoft.com/office/drawing/2010/main" val="0"/>
               </a:ext>
               <a:ext uri="{96DAC541-7B7A-43D3-8B79-37D633B846F1}">
-                <asvg:svgBlip xmlns:asvg="http://schemas.microsoft.com/office/drawing/2016/SVG/main" r:embed="rId3"/>
+                <asvg:svgBlip xmlns:asvg="http://schemas.microsoft.com/office/drawing/2016/SVG/main" r:embed="rId2"/>
               </a:ext>
             </a:extLst>
           </a:blip>
@@ -6582,8 +6466,8 @@
       </dsp:nvSpPr>
       <dsp:spPr>
         <a:xfrm>
-          <a:off x="2888560" y="2512652"/>
-          <a:ext cx="2418750" cy="1102500"/>
+          <a:off x="2888560" y="2582965"/>
+          <a:ext cx="2418750" cy="961875"/>
         </a:xfrm>
         <a:prstGeom prst="rect">
           <a:avLst/>
@@ -6614,7 +6498,7 @@
         <a:p>
           <a:pPr marL="0" lvl="0" indent="0" algn="ctr" defTabSz="488950">
             <a:lnSpc>
-              <a:spcPct val="100000"/>
+              <a:spcPct val="90000"/>
             </a:lnSpc>
             <a:spcBef>
               <a:spcPct val="0"/>
@@ -6637,7 +6521,7 @@
         <a:p>
           <a:pPr marL="0" lvl="0" indent="0" algn="ctr" defTabSz="488950">
             <a:lnSpc>
-              <a:spcPct val="100000"/>
+              <a:spcPct val="90000"/>
             </a:lnSpc>
             <a:spcBef>
               <a:spcPct val="0"/>
@@ -6650,7 +6534,7 @@
           </a:pPr>
           <a:r>
             <a:rPr lang="en-US" sz="1100" kern="1200" dirty="0">
-              <a:hlinkClick xmlns:r="http://schemas.openxmlformats.org/officeDocument/2006/relationships" r:id="rId4"/>
+              <a:hlinkClick xmlns:r="http://schemas.openxmlformats.org/officeDocument/2006/relationships" r:id="rId3"/>
             </a:rPr>
             <a:t>https://github.com/Ag230602/Gen_AI_ADRIJA</a:t>
           </a:r>
@@ -6659,7 +6543,7 @@
         <a:p>
           <a:pPr marL="0" lvl="0" indent="0" algn="ctr" defTabSz="488950">
             <a:lnSpc>
-              <a:spcPct val="100000"/>
+              <a:spcPct val="90000"/>
             </a:lnSpc>
             <a:spcBef>
               <a:spcPct val="0"/>
@@ -6674,6 +6558,9 @@
         </a:p>
         <a:p>
           <a:pPr marL="0" lvl="0" indent="0" algn="ctr" defTabSz="488950">
+            <a:lnSpc>
+              <a:spcPct val="90000"/>
+            </a:lnSpc>
             <a:spcBef>
               <a:spcPct val="0"/>
             </a:spcBef>
@@ -6687,8 +6574,8 @@
         </a:p>
       </dsp:txBody>
       <dsp:txXfrm>
-        <a:off x="2888560" y="2512652"/>
-        <a:ext cx="2418750" cy="1102500"/>
+        <a:off x="2888560" y="2582965"/>
+        <a:ext cx="2418750" cy="961875"/>
       </dsp:txXfrm>
     </dsp:sp>
     <dsp:sp modelId="{2714FDE7-0818-4630-87EC-8C5E039B7D7E}">
@@ -6698,7 +6585,7 @@
       </dsp:nvSpPr>
       <dsp:spPr>
         <a:xfrm>
-          <a:off x="6202248" y="577652"/>
+          <a:off x="6202248" y="647964"/>
           <a:ext cx="1475437" cy="1475437"/>
         </a:xfrm>
         <a:prstGeom prst="ellipse">
@@ -6738,7 +6625,7 @@
       </dsp:nvSpPr>
       <dsp:spPr>
         <a:xfrm>
-          <a:off x="6516685" y="892090"/>
+          <a:off x="6516685" y="962402"/>
           <a:ext cx="846562" cy="846562"/>
         </a:xfrm>
         <a:prstGeom prst="rect">
@@ -6751,7 +6638,7 @@
                 <a14:useLocalDpi xmlns:a14="http://schemas.microsoft.com/office/drawing/2010/main" val="0"/>
               </a:ext>
               <a:ext uri="{96DAC541-7B7A-43D3-8B79-37D633B846F1}">
-                <asvg:svgBlip xmlns:asvg="http://schemas.microsoft.com/office/drawing/2016/SVG/main" r:embed="rId5"/>
+                <asvg:svgBlip xmlns:asvg="http://schemas.microsoft.com/office/drawing/2016/SVG/main" r:embed="rId4"/>
               </a:ext>
             </a:extLst>
           </a:blip>
@@ -6787,8 +6674,8 @@
       </dsp:nvSpPr>
       <dsp:spPr>
         <a:xfrm>
-          <a:off x="5730591" y="2512652"/>
-          <a:ext cx="2418750" cy="1102500"/>
+          <a:off x="5730591" y="2582965"/>
+          <a:ext cx="2418750" cy="961875"/>
         </a:xfrm>
         <a:prstGeom prst="rect">
           <a:avLst/>
@@ -6819,7 +6706,7 @@
         <a:p>
           <a:pPr marL="0" lvl="0" indent="0" algn="ctr" defTabSz="488950">
             <a:lnSpc>
-              <a:spcPct val="100000"/>
+              <a:spcPct val="90000"/>
             </a:lnSpc>
             <a:spcBef>
               <a:spcPct val="0"/>
@@ -6838,7 +6725,7 @@
         <a:p>
           <a:pPr marL="0" lvl="0" indent="0" algn="ctr" defTabSz="488950">
             <a:lnSpc>
-              <a:spcPct val="100000"/>
+              <a:spcPct val="90000"/>
             </a:lnSpc>
             <a:spcBef>
               <a:spcPct val="0"/>
@@ -6850,15 +6737,30 @@
             <a:defRPr cap="all"/>
           </a:pPr>
           <a:r>
+            <a:rPr lang="en-US" sz="1100" kern="1200">
+              <a:hlinkClick xmlns:r="http://schemas.openxmlformats.org/officeDocument/2006/relationships" r:id="rId5"/>
+            </a:rPr>
+            <a:t>https</a:t>
+          </a:r>
+          <a:r>
             <a:rPr lang="en-US" sz="1100" kern="1200" dirty="0">
-              <a:hlinkClick xmlns:r="http://schemas.openxmlformats.org/officeDocument/2006/relationships" r:id="rId6"/>
+              <a:hlinkClick xmlns:r="http://schemas.openxmlformats.org/officeDocument/2006/relationships" r:id="rId5"/>
             </a:rPr>
-            <a:t>https://genaiadrija-4hgtalkipufv8gsbb3qmvi.streamlit.app/</a:t>
+            <a:t>://genaiadrija-4hgtalkipufv8gsbb3qmvi.streamlit.</a:t>
           </a:r>
-          <a:endParaRPr lang="en-US" sz="1100" kern="1200" dirty="0"/>
+          <a:r>
+            <a:rPr lang="en-US" sz="1100" kern="1200">
+              <a:hlinkClick xmlns:r="http://schemas.openxmlformats.org/officeDocument/2006/relationships" r:id="rId5"/>
+            </a:rPr>
+            <a:t>app/</a:t>
+          </a:r>
+          <a:endParaRPr lang="en-US" sz="1100" kern="1200"/>
         </a:p>
         <a:p>
           <a:pPr marL="0" lvl="0" indent="0" algn="ctr" defTabSz="488950">
+            <a:lnSpc>
+              <a:spcPct val="90000"/>
+            </a:lnSpc>
             <a:spcBef>
               <a:spcPct val="0"/>
             </a:spcBef>
@@ -6872,8 +6774,8 @@
         </a:p>
       </dsp:txBody>
       <dsp:txXfrm>
-        <a:off x="5730591" y="2512652"/>
-        <a:ext cx="2418750" cy="1102500"/>
+        <a:off x="5730591" y="2582965"/>
+        <a:ext cx="2418750" cy="961875"/>
       </dsp:txXfrm>
     </dsp:sp>
   </dsp:spTree>
@@ -11987,7 +11889,7 @@
           <a:p>
             <a:fld id="{5BCAD085-E8A6-8845-BD4E-CB4CCA059FC4}" type="datetimeFigureOut">
               <a:rPr lang="en-US" smtClean="0"/>
-              <a:t>5/10/2026</a:t>
+              <a:t>5/10/26</a:t>
             </a:fld>
             <a:endParaRPr lang="en-US"/>
           </a:p>
@@ -12155,7 +12057,7 @@
           <a:p>
             <a:fld id="{5BCAD085-E8A6-8845-BD4E-CB4CCA059FC4}" type="datetimeFigureOut">
               <a:rPr lang="en-US" smtClean="0"/>
-              <a:t>5/10/2026</a:t>
+              <a:t>5/10/26</a:t>
             </a:fld>
             <a:endParaRPr lang="en-US"/>
           </a:p>
@@ -12333,7 +12235,7 @@
           <a:p>
             <a:fld id="{5BCAD085-E8A6-8845-BD4E-CB4CCA059FC4}" type="datetimeFigureOut">
               <a:rPr lang="en-US" smtClean="0"/>
-              <a:t>5/10/2026</a:t>
+              <a:t>5/10/26</a:t>
             </a:fld>
             <a:endParaRPr lang="en-US"/>
           </a:p>
@@ -12501,7 +12403,7 @@
           <a:p>
             <a:fld id="{5BCAD085-E8A6-8845-BD4E-CB4CCA059FC4}" type="datetimeFigureOut">
               <a:rPr lang="en-US" smtClean="0"/>
-              <a:t>5/10/2026</a:t>
+              <a:t>5/10/26</a:t>
             </a:fld>
             <a:endParaRPr lang="en-US"/>
           </a:p>
@@ -12746,7 +12648,7 @@
           <a:p>
             <a:fld id="{5BCAD085-E8A6-8845-BD4E-CB4CCA059FC4}" type="datetimeFigureOut">
               <a:rPr lang="en-US" smtClean="0"/>
-              <a:t>5/10/2026</a:t>
+              <a:t>5/10/26</a:t>
             </a:fld>
             <a:endParaRPr lang="en-US"/>
           </a:p>
@@ -13031,7 +12933,7 @@
           <a:p>
             <a:fld id="{5BCAD085-E8A6-8845-BD4E-CB4CCA059FC4}" type="datetimeFigureOut">
               <a:rPr lang="en-US" smtClean="0"/>
-              <a:t>5/10/2026</a:t>
+              <a:t>5/10/26</a:t>
             </a:fld>
             <a:endParaRPr lang="en-US"/>
           </a:p>
@@ -13450,7 +13352,7 @@
           <a:p>
             <a:fld id="{5BCAD085-E8A6-8845-BD4E-CB4CCA059FC4}" type="datetimeFigureOut">
               <a:rPr lang="en-US" smtClean="0"/>
-              <a:t>5/10/2026</a:t>
+              <a:t>5/10/26</a:t>
             </a:fld>
             <a:endParaRPr lang="en-US"/>
           </a:p>
@@ -13567,7 +13469,7 @@
           <a:p>
             <a:fld id="{5BCAD085-E8A6-8845-BD4E-CB4CCA059FC4}" type="datetimeFigureOut">
               <a:rPr lang="en-US" smtClean="0"/>
-              <a:t>5/10/2026</a:t>
+              <a:t>5/10/26</a:t>
             </a:fld>
             <a:endParaRPr lang="en-US"/>
           </a:p>
@@ -13662,7 +13564,7 @@
           <a:p>
             <a:fld id="{5BCAD085-E8A6-8845-BD4E-CB4CCA059FC4}" type="datetimeFigureOut">
               <a:rPr lang="en-US" smtClean="0"/>
-              <a:t>5/10/2026</a:t>
+              <a:t>5/10/26</a:t>
             </a:fld>
             <a:endParaRPr lang="en-US"/>
           </a:p>
@@ -13937,7 +13839,7 @@
           <a:p>
             <a:fld id="{5BCAD085-E8A6-8845-BD4E-CB4CCA059FC4}" type="datetimeFigureOut">
               <a:rPr lang="en-US" smtClean="0"/>
-              <a:t>5/10/2026</a:t>
+              <a:t>5/10/26</a:t>
             </a:fld>
             <a:endParaRPr lang="en-US"/>
           </a:p>
@@ -14189,7 +14091,7 @@
           <a:p>
             <a:fld id="{5BCAD085-E8A6-8845-BD4E-CB4CCA059FC4}" type="datetimeFigureOut">
               <a:rPr lang="en-US" smtClean="0"/>
-              <a:t>5/10/2026</a:t>
+              <a:t>5/10/26</a:t>
             </a:fld>
             <a:endParaRPr lang="en-US"/>
           </a:p>
@@ -14400,7 +14302,7 @@
           <a:p>
             <a:fld id="{5BCAD085-E8A6-8845-BD4E-CB4CCA059FC4}" type="datetimeFigureOut">
               <a:rPr lang="en-US" smtClean="0"/>
-              <a:t>5/10/2026</a:t>
+              <a:t>5/10/26</a:t>
             </a:fld>
             <a:endParaRPr lang="en-US"/>
           </a:p>
@@ -17420,7 +17322,7 @@
             <p:ph idx="1"/>
             <p:extLst>
               <p:ext uri="{D42A27DB-BD31-4B8C-83A1-F6EECF244321}">
-                <p14:modId xmlns:p14="http://schemas.microsoft.com/office/powerpoint/2010/main" val="182679335"/>
+                <p14:modId xmlns:p14="http://schemas.microsoft.com/office/powerpoint/2010/main" val="2141692744"/>
               </p:ext>
             </p:extLst>
           </p:nvPr>
